--- a/corpus/pptx/deck-hidden-notes.pptx
+++ b/corpus/pptx/deck-hidden-notes.pptx
@@ -35,7 +35,7 @@
       </p:grpSpPr>
       <p:sp>
         <p:nvSpPr>
-          <p:cNvPr id="9" name="PlaceHolder 1"/>
+          <p:cNvPr id="7" name="PlaceHolder 1"/>
           <p:cNvSpPr>
             <a:spLocks noGrp="1"/>
           </p:cNvSpPr>
@@ -57,28 +57,24 @@
           </a:ln>
         </p:spPr>
         <p:txBody>
-          <a:bodyPr lIns="0" tIns="0" rIns="0" bIns="0" anchor="ctr">
+          <a:bodyPr lIns="0" rIns="0" tIns="0" bIns="0" anchor="ctr">
             <a:noAutofit/>
           </a:bodyPr>
           <a:p>
             <a:pPr algn="ctr"/>
             <a:r>
-              <a:rPr lang="en-US" sz="4400" b="0" u="none" strike="noStrike">
-                <a:solidFill>
-                  <a:srgbClr val="000000"/>
-                </a:solidFill>
-                <a:effectLst/>
-                <a:uFillTx/>
+              <a:rPr b="0" lang="en-US" sz="4400" spc="-1" strike="noStrike">
+                <a:solidFill>
+                  <a:srgbClr val="000000"/>
+                </a:solidFill>
                 <a:latin typeface="Arial"/>
               </a:rPr>
               <a:t>Click to move the slide</a:t>
             </a:r>
-            <a:endParaRPr lang="en-US" sz="4400" b="0" u="none" strike="noStrike">
-              <a:solidFill>
-                <a:srgbClr val="000000"/>
-              </a:solidFill>
-              <a:effectLst/>
-              <a:uFillTx/>
+            <a:endParaRPr b="0" lang="en-US" sz="4400" spc="-1" strike="noStrike">
+              <a:solidFill>
+                <a:srgbClr val="000000"/>
+              </a:solidFill>
               <a:latin typeface="Arial"/>
             </a:endParaRPr>
           </a:p>
@@ -86,7 +82,7 @@
       </p:sp>
       <p:sp>
         <p:nvSpPr>
-          <p:cNvPr id="10" name="PlaceHolder 2"/>
+          <p:cNvPr id="8" name="PlaceHolder 2"/>
           <p:cNvSpPr>
             <a:spLocks noGrp="1"/>
           </p:cNvSpPr>
@@ -108,30 +104,26 @@
           </a:ln>
         </p:spPr>
         <p:txBody>
-          <a:bodyPr lIns="0" tIns="0" rIns="0" bIns="0" anchor="t">
+          <a:bodyPr lIns="0" rIns="0" tIns="0" bIns="0" anchor="t">
             <a:noAutofit/>
           </a:bodyPr>
           <a:p>
-            <a:pPr indent="0" algn="l">
-              <a:buNone/>
-            </a:pPr>
-            <a:r>
-              <a:rPr lang="en-US" sz="2000" b="0" u="none" strike="noStrike">
-                <a:solidFill>
-                  <a:srgbClr val="000000"/>
-                </a:solidFill>
-                <a:effectLst/>
-                <a:uFillTx/>
+            <a:pPr marL="216000" indent="-216000">
+              <a:buNone/>
+            </a:pPr>
+            <a:r>
+              <a:rPr b="0" lang="en-US" sz="2000" spc="-1" strike="noStrike">
+                <a:solidFill>
+                  <a:srgbClr val="000000"/>
+                </a:solidFill>
                 <a:latin typeface="Arial"/>
               </a:rPr>
               <a:t>Click to edit the notes format</a:t>
             </a:r>
-            <a:endParaRPr lang="en-US" sz="2000" b="0" u="none" strike="noStrike">
-              <a:solidFill>
-                <a:srgbClr val="000000"/>
-              </a:solidFill>
-              <a:effectLst/>
-              <a:uFillTx/>
+            <a:endParaRPr b="0" lang="en-US" sz="2000" spc="-1" strike="noStrike">
+              <a:solidFill>
+                <a:srgbClr val="000000"/>
+              </a:solidFill>
               <a:latin typeface="Arial"/>
             </a:endParaRPr>
           </a:p>
@@ -139,7 +131,7 @@
       </p:sp>
       <p:sp>
         <p:nvSpPr>
-          <p:cNvPr id="11" name="PlaceHolder 3"/>
+          <p:cNvPr id="9" name="PlaceHolder 3"/>
           <p:cNvSpPr>
             <a:spLocks noGrp="1"/>
           </p:cNvSpPr>
@@ -161,30 +153,26 @@
           </a:ln>
         </p:spPr>
         <p:txBody>
-          <a:bodyPr lIns="0" tIns="0" rIns="0" bIns="0" anchor="t">
+          <a:bodyPr lIns="0" rIns="0" tIns="0" bIns="0" anchor="t">
             <a:noAutofit/>
           </a:bodyPr>
           <a:p>
-            <a:pPr indent="0" algn="l">
-              <a:buNone/>
-            </a:pPr>
-            <a:r>
-              <a:rPr lang="en-US" sz="1400" b="0" u="none" strike="noStrike">
-                <a:solidFill>
-                  <a:srgbClr val="000000"/>
-                </a:solidFill>
-                <a:effectLst/>
-                <a:uFillTx/>
+            <a:pPr indent="0">
+              <a:buNone/>
+            </a:pPr>
+            <a:r>
+              <a:rPr b="0" lang="en-US" sz="1400" spc="-1" strike="noStrike">
+                <a:solidFill>
+                  <a:srgbClr val="000000"/>
+                </a:solidFill>
                 <a:latin typeface="Times New Roman"/>
               </a:rPr>
               <a:t>&lt;header&gt;</a:t>
             </a:r>
-            <a:endParaRPr lang="en-US" sz="1400" b="0" u="none" strike="noStrike">
-              <a:solidFill>
-                <a:srgbClr val="000000"/>
-              </a:solidFill>
-              <a:effectLst/>
-              <a:uFillTx/>
+            <a:endParaRPr b="0" lang="en-US" sz="1400" spc="-1" strike="noStrike">
+              <a:solidFill>
+                <a:srgbClr val="000000"/>
+              </a:solidFill>
               <a:latin typeface="Times New Roman"/>
             </a:endParaRPr>
           </a:p>
@@ -192,7 +180,7 @@
       </p:sp>
       <p:sp>
         <p:nvSpPr>
-          <p:cNvPr id="12" name="PlaceHolder 4"/>
+          <p:cNvPr id="10" name="PlaceHolder 4"/>
           <p:cNvSpPr>
             <a:spLocks noGrp="1"/>
           </p:cNvSpPr>
@@ -214,18 +202,16 @@
           </a:ln>
         </p:spPr>
         <p:txBody>
-          <a:bodyPr lIns="0" tIns="0" rIns="0" bIns="0" anchor="t">
+          <a:bodyPr lIns="0" rIns="0" tIns="0" bIns="0" anchor="t">
             <a:noAutofit/>
           </a:bodyPr>
           <a:lstStyle>
             <a:lvl1pPr indent="0" algn="r">
               <a:buNone/>
-              <a:defRPr lang="en-US" sz="1400" b="0" u="none" strike="noStrike">
-                <a:solidFill>
-                  <a:srgbClr val="000000"/>
-                </a:solidFill>
-                <a:effectLst/>
-                <a:uFillTx/>
+              <a:defRPr b="0" lang="en-US" sz="1400" spc="-1" strike="noStrike">
+                <a:solidFill>
+                  <a:srgbClr val="000000"/>
+                </a:solidFill>
                 <a:latin typeface="Times New Roman"/>
               </a:defRPr>
             </a:lvl1pPr>
@@ -235,22 +221,18 @@
               <a:buNone/>
             </a:pPr>
             <a:r>
-              <a:rPr lang="en-US" sz="1400" b="0" u="none" strike="noStrike">
-                <a:solidFill>
-                  <a:srgbClr val="000000"/>
-                </a:solidFill>
-                <a:effectLst/>
-                <a:uFillTx/>
+              <a:rPr b="0" lang="en-US" sz="1400" spc="-1" strike="noStrike">
+                <a:solidFill>
+                  <a:srgbClr val="000000"/>
+                </a:solidFill>
                 <a:latin typeface="Times New Roman"/>
               </a:rPr>
               <a:t>&lt;date/time&gt;</a:t>
             </a:r>
-            <a:endParaRPr lang="en-US" sz="1400" b="0" u="none" strike="noStrike">
-              <a:solidFill>
-                <a:srgbClr val="000000"/>
-              </a:solidFill>
-              <a:effectLst/>
-              <a:uFillTx/>
+            <a:endParaRPr b="0" lang="en-US" sz="1400" spc="-1" strike="noStrike">
+              <a:solidFill>
+                <a:srgbClr val="000000"/>
+              </a:solidFill>
               <a:latin typeface="Times New Roman"/>
             </a:endParaRPr>
           </a:p>
@@ -258,7 +240,7 @@
       </p:sp>
       <p:sp>
         <p:nvSpPr>
-          <p:cNvPr id="13" name="PlaceHolder 5"/>
+          <p:cNvPr id="11" name="PlaceHolder 5"/>
           <p:cNvSpPr>
             <a:spLocks noGrp="1"/>
           </p:cNvSpPr>
@@ -280,43 +262,37 @@
           </a:ln>
         </p:spPr>
         <p:txBody>
-          <a:bodyPr lIns="0" tIns="0" rIns="0" bIns="0" anchor="b">
+          <a:bodyPr lIns="0" rIns="0" tIns="0" bIns="0" anchor="b">
             <a:noAutofit/>
           </a:bodyPr>
           <a:lstStyle>
-            <a:lvl1pPr indent="0" algn="l">
-              <a:buNone/>
-              <a:defRPr lang="en-US" sz="1400" b="0" u="none" strike="noStrike">
-                <a:solidFill>
-                  <a:srgbClr val="000000"/>
-                </a:solidFill>
-                <a:effectLst/>
-                <a:uFillTx/>
+            <a:lvl1pPr indent="0">
+              <a:buNone/>
+              <a:defRPr b="0" lang="en-US" sz="1400" spc="-1" strike="noStrike">
+                <a:solidFill>
+                  <a:srgbClr val="000000"/>
+                </a:solidFill>
                 <a:latin typeface="Times New Roman"/>
               </a:defRPr>
             </a:lvl1pPr>
           </a:lstStyle>
           <a:p>
-            <a:pPr indent="0" algn="l">
-              <a:buNone/>
-            </a:pPr>
-            <a:r>
-              <a:rPr lang="en-US" sz="1400" b="0" u="none" strike="noStrike">
-                <a:solidFill>
-                  <a:srgbClr val="000000"/>
-                </a:solidFill>
-                <a:effectLst/>
-                <a:uFillTx/>
+            <a:pPr indent="0">
+              <a:buNone/>
+            </a:pPr>
+            <a:r>
+              <a:rPr b="0" lang="en-US" sz="1400" spc="-1" strike="noStrike">
+                <a:solidFill>
+                  <a:srgbClr val="000000"/>
+                </a:solidFill>
                 <a:latin typeface="Times New Roman"/>
               </a:rPr>
               <a:t>&lt;footer&gt;</a:t>
             </a:r>
-            <a:endParaRPr lang="en-US" sz="1400" b="0" u="none" strike="noStrike">
-              <a:solidFill>
-                <a:srgbClr val="000000"/>
-              </a:solidFill>
-              <a:effectLst/>
-              <a:uFillTx/>
+            <a:endParaRPr b="0" lang="en-US" sz="1400" spc="-1" strike="noStrike">
+              <a:solidFill>
+                <a:srgbClr val="000000"/>
+              </a:solidFill>
               <a:latin typeface="Times New Roman"/>
             </a:endParaRPr>
           </a:p>
@@ -324,7 +300,7 @@
       </p:sp>
       <p:sp>
         <p:nvSpPr>
-          <p:cNvPr id="14" name="PlaceHolder 6"/>
+          <p:cNvPr id="12" name="PlaceHolder 6"/>
           <p:cNvSpPr>
             <a:spLocks noGrp="1"/>
           </p:cNvSpPr>
@@ -346,18 +322,16 @@
           </a:ln>
         </p:spPr>
         <p:txBody>
-          <a:bodyPr lIns="0" tIns="0" rIns="0" bIns="0" anchor="b">
+          <a:bodyPr lIns="0" rIns="0" tIns="0" bIns="0" anchor="b">
             <a:noAutofit/>
           </a:bodyPr>
           <a:lstStyle>
             <a:lvl1pPr indent="0" algn="r">
               <a:buNone/>
-              <a:defRPr lang="en-US" sz="1400" b="0" u="none" strike="noStrike">
-                <a:solidFill>
-                  <a:srgbClr val="000000"/>
-                </a:solidFill>
-                <a:effectLst/>
-                <a:uFillTx/>
+              <a:defRPr b="0" lang="en-US" sz="1400" spc="-1" strike="noStrike">
+                <a:solidFill>
+                  <a:srgbClr val="000000"/>
+                </a:solidFill>
                 <a:latin typeface="Times New Roman"/>
               </a:defRPr>
             </a:lvl1pPr>
@@ -366,23 +340,19 @@
             <a:pPr indent="0" algn="r">
               <a:buNone/>
             </a:pPr>
-            <a:fld id="{1BCF22CB-7DB3-4122-85ED-840D7B88EFFB}" type="slidenum">
-              <a:rPr lang="en-US" sz="1400" b="0" u="none" strike="noStrike">
-                <a:solidFill>
-                  <a:srgbClr val="000000"/>
-                </a:solidFill>
-                <a:effectLst/>
-                <a:uFillTx/>
+            <a:fld id="{DCB78FF4-291A-4426-871E-98B47210EB7F}" type="slidenum">
+              <a:rPr b="0" lang="en-US" sz="1400" spc="-1" strike="noStrike">
+                <a:solidFill>
+                  <a:srgbClr val="000000"/>
+                </a:solidFill>
                 <a:latin typeface="Times New Roman"/>
               </a:rPr>
               <a:t>&lt;number&gt;</a:t>
             </a:fld>
-            <a:endParaRPr lang="en-US" sz="1400" b="0" u="none" strike="noStrike">
-              <a:solidFill>
-                <a:srgbClr val="000000"/>
-              </a:solidFill>
-              <a:effectLst/>
-              <a:uFillTx/>
+            <a:endParaRPr b="0" lang="en-US" sz="1400" spc="-1" strike="noStrike">
+              <a:solidFill>
+                <a:srgbClr val="000000"/>
+              </a:solidFill>
               <a:latin typeface="Times New Roman"/>
             </a:endParaRPr>
           </a:p>
@@ -413,7 +383,7 @@
       </p:grpSpPr>
       <p:sp>
         <p:nvSpPr>
-          <p:cNvPr id="18" name=""/>
+          <p:cNvPr id="16" name=""/>
           <p:cNvSpPr txBox="1"/>
           <p:nvPr/>
         </p:nvSpPr>
@@ -426,41 +396,32 @@
             <a:avLst/>
           </a:prstGeom>
           <a:solidFill>
-            <a:schemeClr val="accent1"/>
+            <a:srgbClr val="729fcf"/>
           </a:solidFill>
-          <a:ln w="38160">
+          <a:ln w="0">
             <a:solidFill>
-              <a:schemeClr val="accent1">
-                <a:lumMod val="75000"/>
-                <a:lumOff val="0"/>
-              </a:schemeClr>
+              <a:srgbClr val="3465a4"/>
             </a:solidFill>
-            <a:round/>
-          </a:ln>
-        </p:spPr>
-        <p:txBody>
-          <a:bodyPr lIns="90000" tIns="45000" rIns="90000" bIns="45000" anchor="t">
-            <a:spAutoFit/>
-          </a:bodyPr>
-          <a:p>
-            <a:pPr/>
-            <a:r>
-              <a:rPr lang="en-US" sz="1800" b="0" u="none" strike="noStrike">
-                <a:solidFill>
-                  <a:srgbClr val="FFFFFF"/>
-                </a:solidFill>
-                <a:effectLst/>
-                <a:uFillTx/>
+          </a:ln>
+        </p:spPr>
+        <p:txBody>
+          <a:bodyPr lIns="90000" rIns="90000" tIns="45000" bIns="45000" anchor="t">
+            <a:noAutofit/>
+          </a:bodyPr>
+          <a:p>
+            <a:r>
+              <a:rPr b="0" lang="en-US" sz="1800" spc="-1" strike="noStrike">
+                <a:solidFill>
+                  <a:srgbClr val="000000"/>
+                </a:solidFill>
                 <a:latin typeface="Arial"/>
               </a:rPr>
               <a:t>Speak to the quality checks.</a:t>
             </a:r>
-            <a:endParaRPr lang="en-US" sz="1800" b="0" u="none" strike="noStrike">
-              <a:solidFill>
-                <a:srgbClr val="FFFFFF"/>
-              </a:solidFill>
-              <a:effectLst/>
-              <a:uFillTx/>
+            <a:endParaRPr b="0" lang="en-US" sz="1800" spc="-1" strike="noStrike">
+              <a:solidFill>
+                <a:srgbClr val="000000"/>
+              </a:solidFill>
               <a:latin typeface="Arial"/>
             </a:endParaRPr>
           </a:p>
@@ -522,7 +483,7 @@
         <p:txBody>
           <a:bodyPr/>
           <a:p>
-            <a:fld id="{1D553CBD-41BD-4255-8A2B-55C41A4864B3}" type="slidenum">
+            <a:fld id="{09D50646-A08D-4BAE-985D-326D08821067}" type="slidenum">
               <a:t>&lt;#&gt;</a:t>
             </a:fld>
           </a:p>
@@ -573,7 +534,7 @@
       </p:grpSpPr>
       <p:sp>
         <p:nvSpPr>
-          <p:cNvPr id="7" name="PlaceHolder 1"/>
+          <p:cNvPr id="5" name="PlaceHolder 1"/>
           <p:cNvSpPr>
             <a:spLocks noGrp="1"/>
           </p:cNvSpPr>
@@ -595,19 +556,17 @@
           </a:ln>
         </p:spPr>
         <p:txBody>
-          <a:bodyPr lIns="0" tIns="0" rIns="0" bIns="0" anchor="ctr">
-            <a:spAutoFit/>
+          <a:bodyPr lIns="0" rIns="0" tIns="0" bIns="0" anchor="ctr">
+            <a:noAutofit/>
           </a:bodyPr>
           <a:p>
             <a:pPr indent="0" algn="ctr">
               <a:buNone/>
             </a:pPr>
-            <a:endParaRPr lang="en-US" sz="4400" b="0" u="none" strike="noStrike">
-              <a:solidFill>
-                <a:srgbClr val="000000"/>
-              </a:solidFill>
-              <a:effectLst/>
-              <a:uFillTx/>
+            <a:endParaRPr b="0" lang="en-US" sz="4400" spc="-1" strike="noStrike">
+              <a:solidFill>
+                <a:srgbClr val="000000"/>
+              </a:solidFill>
               <a:latin typeface="Arial"/>
             </a:endParaRPr>
           </a:p>
@@ -615,7 +574,7 @@
       </p:sp>
       <p:sp>
         <p:nvSpPr>
-          <p:cNvPr id="8" name="PlaceHolder 2"/>
+          <p:cNvPr id="6" name="PlaceHolder 2"/>
           <p:cNvSpPr>
             <a:spLocks noGrp="1"/>
           </p:cNvSpPr>
@@ -637,19 +596,17 @@
           </a:ln>
         </p:spPr>
         <p:txBody>
-          <a:bodyPr lIns="0" tIns="0" rIns="0" bIns="0" anchor="ctr">
-            <a:spAutoFit/>
+          <a:bodyPr lIns="0" rIns="0" tIns="0" bIns="0" anchor="ctr">
+            <a:noAutofit/>
           </a:bodyPr>
           <a:p>
             <a:pPr indent="0" algn="ctr">
               <a:buNone/>
             </a:pPr>
-            <a:endParaRPr lang="en-US" sz="3200" b="0" u="none" strike="noStrike">
-              <a:solidFill>
-                <a:srgbClr val="000000"/>
-              </a:solidFill>
-              <a:effectLst/>
-              <a:uFillTx/>
+            <a:endParaRPr b="0" lang="en-US" sz="3200" spc="-1" strike="noStrike">
+              <a:solidFill>
+                <a:srgbClr val="000000"/>
+              </a:solidFill>
               <a:latin typeface="Arial"/>
             </a:endParaRPr>
           </a:p>
@@ -689,7 +646,7 @@
         <p:txBody>
           <a:bodyPr/>
           <a:p>
-            <a:fld id="{33CC2399-11BA-4D2D-8812-9E59DCC98BA1}" type="slidenum">
+            <a:fld id="{51976317-82DB-4601-93AE-790C4A1DA6AC}" type="slidenum">
               <a:t>&lt;#&gt;</a:t>
             </a:fld>
           </a:p>
@@ -740,7 +697,7 @@
       </p:grpSpPr>
       <p:sp>
         <p:nvSpPr>
-          <p:cNvPr id="2" name="PlaceHolder 1"/>
+          <p:cNvPr id="0" name="PlaceHolder 1"/>
           <p:cNvSpPr>
             <a:spLocks noGrp="1"/>
           </p:cNvSpPr>
@@ -762,43 +719,26 @@
           </a:ln>
         </p:spPr>
         <p:txBody>
-          <a:bodyPr lIns="0" tIns="0" rIns="0" bIns="0" anchor="ctr">
+          <a:bodyPr lIns="0" rIns="0" tIns="0" bIns="0" anchor="ctr">
             <a:noAutofit/>
           </a:bodyPr>
-          <a:lstStyle>
-            <a:lvl1pPr indent="0" algn="ctr">
-              <a:buNone/>
-              <a:defRPr lang="en-US" sz="4400" b="0" u="none" strike="noStrike">
-                <a:solidFill>
-                  <a:srgbClr val="000000"/>
-                </a:solidFill>
-                <a:effectLst/>
-                <a:uFillTx/>
+          <a:p>
+            <a:pPr indent="0" algn="ctr">
+              <a:buNone/>
+            </a:pPr>
+            <a:r>
+              <a:rPr b="0" lang="en-US" sz="4400" spc="-1" strike="noStrike">
+                <a:solidFill>
+                  <a:srgbClr val="000000"/>
+                </a:solidFill>
                 <a:latin typeface="Arial"/>
-              </a:defRPr>
-            </a:lvl1pPr>
-          </a:lstStyle>
-          <a:p>
-            <a:pPr indent="0" algn="ctr">
-              <a:buNone/>
-            </a:pPr>
-            <a:r>
-              <a:rPr lang="en-US" sz="4400" b="0" u="none" strike="noStrike">
-                <a:solidFill>
-                  <a:srgbClr val="000000"/>
-                </a:solidFill>
-                <a:effectLst/>
-                <a:uFillTx/>
-                <a:latin typeface="Arial"/>
               </a:rPr>
               <a:t>Click to edit the title text format</a:t>
             </a:r>
-            <a:endParaRPr lang="en-US" sz="4400" b="0" u="none" strike="noStrike">
-              <a:solidFill>
-                <a:srgbClr val="000000"/>
-              </a:solidFill>
-              <a:effectLst/>
-              <a:uFillTx/>
+            <a:endParaRPr b="0" lang="en-US" sz="4400" spc="-1" strike="noStrike">
+              <a:solidFill>
+                <a:srgbClr val="000000"/>
+              </a:solidFill>
               <a:latin typeface="Arial"/>
             </a:endParaRPr>
           </a:p>
@@ -806,7 +746,7 @@
       </p:sp>
       <p:sp>
         <p:nvSpPr>
-          <p:cNvPr id="3" name="PlaceHolder 2"/>
+          <p:cNvPr id="1" name="PlaceHolder 2"/>
           <p:cNvSpPr>
             <a:spLocks noGrp="1"/>
           </p:cNvSpPr>
@@ -828,11 +768,11 @@
           </a:ln>
         </p:spPr>
         <p:txBody>
-          <a:bodyPr lIns="0" tIns="0" rIns="0" bIns="0" anchor="t">
+          <a:bodyPr lIns="0" rIns="0" tIns="0" bIns="0" anchor="t">
             <a:normAutofit/>
           </a:bodyPr>
-          <a:lstStyle>
-            <a:lvl1pPr algn="l">
+          <a:p>
+            <a:pPr marL="432000" indent="-324000">
               <a:spcBef>
                 <a:spcPts val="1417"/>
               </a:spcBef>
@@ -842,16 +782,25 @@
               <a:buSzPct val="45000"/>
               <a:buFont typeface="Wingdings" charset="2"/>
               <a:buChar char=""/>
-              <a:defRPr lang="en-US" sz="3200" b="0" u="none" strike="noStrike">
-                <a:solidFill>
-                  <a:srgbClr val="000000"/>
-                </a:solidFill>
-                <a:effectLst/>
-                <a:uFillTx/>
+            </a:pPr>
+            <a:r>
+              <a:rPr b="0" lang="en-US" sz="3200" spc="-1" strike="noStrike">
+                <a:solidFill>
+                  <a:srgbClr val="000000"/>
+                </a:solidFill>
                 <a:latin typeface="Arial"/>
-              </a:defRPr>
-            </a:lvl1pPr>
-            <a:lvl2pPr lvl="1" algn="l">
+              </a:rPr>
+              <a:t>Click to edit the outline text format</a:t>
+            </a:r>
+            <a:endParaRPr b="0" lang="en-US" sz="3200" spc="-1" strike="noStrike">
+              <a:solidFill>
+                <a:srgbClr val="000000"/>
+              </a:solidFill>
+              <a:latin typeface="Arial"/>
+            </a:endParaRPr>
+          </a:p>
+          <a:p>
+            <a:pPr lvl="1" marL="864000" indent="-324000">
               <a:spcBef>
                 <a:spcPts val="1134"/>
               </a:spcBef>
@@ -861,16 +810,25 @@
               <a:buSzPct val="75000"/>
               <a:buFont typeface="Symbol" charset="2"/>
               <a:buChar char=""/>
-              <a:defRPr lang="en-US" sz="2800" b="0" u="none" strike="noStrike">
-                <a:solidFill>
-                  <a:srgbClr val="000000"/>
-                </a:solidFill>
-                <a:effectLst/>
-                <a:uFillTx/>
+            </a:pPr>
+            <a:r>
+              <a:rPr b="0" lang="en-US" sz="2800" spc="-1" strike="noStrike">
+                <a:solidFill>
+                  <a:srgbClr val="000000"/>
+                </a:solidFill>
                 <a:latin typeface="Arial"/>
-              </a:defRPr>
-            </a:lvl2pPr>
-            <a:lvl3pPr lvl="2" algn="l">
+              </a:rPr>
+              <a:t>Second Outline Level</a:t>
+            </a:r>
+            <a:endParaRPr b="0" lang="en-US" sz="2800" spc="-1" strike="noStrike">
+              <a:solidFill>
+                <a:srgbClr val="000000"/>
+              </a:solidFill>
+              <a:latin typeface="Arial"/>
+            </a:endParaRPr>
+          </a:p>
+          <a:p>
+            <a:pPr lvl="2" marL="1296000" indent="-288000">
               <a:spcBef>
                 <a:spcPts val="850"/>
               </a:spcBef>
@@ -880,16 +838,25 @@
               <a:buSzPct val="45000"/>
               <a:buFont typeface="Wingdings" charset="2"/>
               <a:buChar char=""/>
-              <a:defRPr lang="en-US" sz="2400" b="0" u="none" strike="noStrike">
-                <a:solidFill>
-                  <a:srgbClr val="000000"/>
-                </a:solidFill>
-                <a:effectLst/>
-                <a:uFillTx/>
+            </a:pPr>
+            <a:r>
+              <a:rPr b="0" lang="en-US" sz="2400" spc="-1" strike="noStrike">
+                <a:solidFill>
+                  <a:srgbClr val="000000"/>
+                </a:solidFill>
                 <a:latin typeface="Arial"/>
-              </a:defRPr>
-            </a:lvl3pPr>
-            <a:lvl4pPr lvl="3" algn="l">
+              </a:rPr>
+              <a:t>Third Outline Level</a:t>
+            </a:r>
+            <a:endParaRPr b="0" lang="en-US" sz="2400" spc="-1" strike="noStrike">
+              <a:solidFill>
+                <a:srgbClr val="000000"/>
+              </a:solidFill>
+              <a:latin typeface="Arial"/>
+            </a:endParaRPr>
+          </a:p>
+          <a:p>
+            <a:pPr lvl="3" marL="1728000" indent="-216000">
               <a:spcBef>
                 <a:spcPts val="567"/>
               </a:spcBef>
@@ -899,16 +866,25 @@
               <a:buSzPct val="75000"/>
               <a:buFont typeface="Symbol" charset="2"/>
               <a:buChar char=""/>
-              <a:defRPr lang="en-US" sz="2000" b="0" u="none" strike="noStrike">
-                <a:solidFill>
-                  <a:srgbClr val="000000"/>
-                </a:solidFill>
-                <a:effectLst/>
-                <a:uFillTx/>
+            </a:pPr>
+            <a:r>
+              <a:rPr b="0" lang="en-US" sz="2000" spc="-1" strike="noStrike">
+                <a:solidFill>
+                  <a:srgbClr val="000000"/>
+                </a:solidFill>
                 <a:latin typeface="Arial"/>
-              </a:defRPr>
-            </a:lvl4pPr>
-            <a:lvl5pPr lvl="4" algn="l">
+              </a:rPr>
+              <a:t>Fourth Outline Level</a:t>
+            </a:r>
+            <a:endParaRPr b="0" lang="en-US" sz="2000" spc="-1" strike="noStrike">
+              <a:solidFill>
+                <a:srgbClr val="000000"/>
+              </a:solidFill>
+              <a:latin typeface="Arial"/>
+            </a:endParaRPr>
+          </a:p>
+          <a:p>
+            <a:pPr lvl="4" marL="2160000" indent="-216000">
               <a:spcBef>
                 <a:spcPts val="283"/>
               </a:spcBef>
@@ -918,16 +894,25 @@
               <a:buSzPct val="45000"/>
               <a:buFont typeface="Wingdings" charset="2"/>
               <a:buChar char=""/>
-              <a:defRPr lang="en-US" sz="2000" b="0" u="none" strike="noStrike">
-                <a:solidFill>
-                  <a:srgbClr val="000000"/>
-                </a:solidFill>
-                <a:effectLst/>
-                <a:uFillTx/>
+            </a:pPr>
+            <a:r>
+              <a:rPr b="0" lang="en-US" sz="2000" spc="-1" strike="noStrike">
+                <a:solidFill>
+                  <a:srgbClr val="000000"/>
+                </a:solidFill>
                 <a:latin typeface="Arial"/>
-              </a:defRPr>
-            </a:lvl5pPr>
-            <a:lvl6pPr lvl="5" algn="l">
+              </a:rPr>
+              <a:t>Fifth Outline Level</a:t>
+            </a:r>
+            <a:endParaRPr b="0" lang="en-US" sz="2000" spc="-1" strike="noStrike">
+              <a:solidFill>
+                <a:srgbClr val="000000"/>
+              </a:solidFill>
+              <a:latin typeface="Arial"/>
+            </a:endParaRPr>
+          </a:p>
+          <a:p>
+            <a:pPr lvl="5" marL="2592000" indent="-216000">
               <a:spcBef>
                 <a:spcPts val="283"/>
               </a:spcBef>
@@ -937,16 +922,25 @@
               <a:buSzPct val="45000"/>
               <a:buFont typeface="Wingdings" charset="2"/>
               <a:buChar char=""/>
-              <a:defRPr lang="en-US" sz="2000" b="0" u="none" strike="noStrike">
-                <a:solidFill>
-                  <a:srgbClr val="000000"/>
-                </a:solidFill>
-                <a:effectLst/>
-                <a:uFillTx/>
+            </a:pPr>
+            <a:r>
+              <a:rPr b="0" lang="en-US" sz="2000" spc="-1" strike="noStrike">
+                <a:solidFill>
+                  <a:srgbClr val="000000"/>
+                </a:solidFill>
                 <a:latin typeface="Arial"/>
-              </a:defRPr>
-            </a:lvl6pPr>
-            <a:lvl7pPr lvl="6" algn="l">
+              </a:rPr>
+              <a:t>Sixth Outline Level</a:t>
+            </a:r>
+            <a:endParaRPr b="0" lang="en-US" sz="2000" spc="-1" strike="noStrike">
+              <a:solidFill>
+                <a:srgbClr val="000000"/>
+              </a:solidFill>
+              <a:latin typeface="Arial"/>
+            </a:endParaRPr>
+          </a:p>
+          <a:p>
+            <a:pPr lvl="6" marL="3024000" indent="-216000">
               <a:spcBef>
                 <a:spcPts val="283"/>
               </a:spcBef>
@@ -956,245 +950,28 @@
               <a:buSzPct val="45000"/>
               <a:buFont typeface="Wingdings" charset="2"/>
               <a:buChar char=""/>
-              <a:defRPr lang="en-US" sz="2000" b="0" u="none" strike="noStrike">
-                <a:solidFill>
-                  <a:srgbClr val="000000"/>
-                </a:solidFill>
-                <a:effectLst/>
-                <a:uFillTx/>
+            </a:pPr>
+            <a:r>
+              <a:rPr b="0" lang="en-US" sz="2000" spc="-1" strike="noStrike">
+                <a:solidFill>
+                  <a:srgbClr val="000000"/>
+                </a:solidFill>
                 <a:latin typeface="Arial"/>
-              </a:defRPr>
-            </a:lvl7pPr>
-          </a:lstStyle>
-          <a:p>
-            <a:pPr marL="432000" indent="-324000" algn="l">
-              <a:spcBef>
-                <a:spcPts val="1417"/>
-              </a:spcBef>
-              <a:buClr>
-                <a:srgbClr val="000000"/>
-              </a:buClr>
-              <a:buSzPct val="45000"/>
-              <a:buFont typeface="Wingdings" charset="2"/>
-              <a:buChar char=""/>
-            </a:pPr>
-            <a:r>
-              <a:rPr lang="en-US" sz="3200" b="0" u="none" strike="noStrike">
-                <a:solidFill>
-                  <a:srgbClr val="000000"/>
-                </a:solidFill>
-                <a:effectLst/>
-                <a:uFillTx/>
-                <a:latin typeface="Arial"/>
-              </a:rPr>
-              <a:t>Click to edit the outline text format</a:t>
-            </a:r>
-            <a:endParaRPr lang="en-US" sz="3200" b="0" u="none" strike="noStrike">
-              <a:solidFill>
-                <a:srgbClr val="000000"/>
-              </a:solidFill>
-              <a:effectLst/>
-              <a:uFillTx/>
+              </a:rPr>
+              <a:t>Seventh Outline Level</a:t>
+            </a:r>
+            <a:endParaRPr b="0" lang="en-US" sz="2000" spc="-1" strike="noStrike">
+              <a:solidFill>
+                <a:srgbClr val="000000"/>
+              </a:solidFill>
               <a:latin typeface="Arial"/>
             </a:endParaRPr>
           </a:p>
-          <a:p>
-            <a:pPr marL="864000" lvl="1" indent="-324000" algn="l">
-              <a:spcBef>
-                <a:spcPts val="1134"/>
-              </a:spcBef>
-              <a:buClr>
-                <a:srgbClr val="000000"/>
-              </a:buClr>
-              <a:buSzPct val="75000"/>
-              <a:buFont typeface="Symbol" charset="2"/>
-              <a:buChar char=""/>
-            </a:pPr>
-            <a:r>
-              <a:rPr lang="en-US" sz="2800" b="0" u="none" strike="noStrike">
-                <a:solidFill>
-                  <a:srgbClr val="000000"/>
-                </a:solidFill>
-                <a:effectLst/>
-                <a:uFillTx/>
-                <a:latin typeface="Arial"/>
-              </a:rPr>
-              <a:t>Second Outline Level</a:t>
-            </a:r>
-            <a:endParaRPr lang="en-US" sz="2800" b="0" u="none" strike="noStrike">
-              <a:solidFill>
-                <a:srgbClr val="000000"/>
-              </a:solidFill>
-              <a:effectLst/>
-              <a:uFillTx/>
-              <a:latin typeface="Arial"/>
-            </a:endParaRPr>
-          </a:p>
-          <a:p>
-            <a:pPr marL="1296000" lvl="2" indent="-288000" algn="l">
-              <a:spcBef>
-                <a:spcPts val="850"/>
-              </a:spcBef>
-              <a:buClr>
-                <a:srgbClr val="000000"/>
-              </a:buClr>
-              <a:buSzPct val="45000"/>
-              <a:buFont typeface="Wingdings" charset="2"/>
-              <a:buChar char=""/>
-            </a:pPr>
-            <a:r>
-              <a:rPr lang="en-US" sz="2400" b="0" u="none" strike="noStrike">
-                <a:solidFill>
-                  <a:srgbClr val="000000"/>
-                </a:solidFill>
-                <a:effectLst/>
-                <a:uFillTx/>
-                <a:latin typeface="Arial"/>
-              </a:rPr>
-              <a:t>Third Outline Level</a:t>
-            </a:r>
-            <a:endParaRPr lang="en-US" sz="2400" b="0" u="none" strike="noStrike">
-              <a:solidFill>
-                <a:srgbClr val="000000"/>
-              </a:solidFill>
-              <a:effectLst/>
-              <a:uFillTx/>
-              <a:latin typeface="Arial"/>
-            </a:endParaRPr>
-          </a:p>
-          <a:p>
-            <a:pPr marL="1728000" lvl="3" indent="-216000" algn="l">
-              <a:spcBef>
-                <a:spcPts val="567"/>
-              </a:spcBef>
-              <a:buClr>
-                <a:srgbClr val="000000"/>
-              </a:buClr>
-              <a:buSzPct val="75000"/>
-              <a:buFont typeface="Symbol" charset="2"/>
-              <a:buChar char=""/>
-            </a:pPr>
-            <a:r>
-              <a:rPr lang="en-US" sz="2000" b="0" u="none" strike="noStrike">
-                <a:solidFill>
-                  <a:srgbClr val="000000"/>
-                </a:solidFill>
-                <a:effectLst/>
-                <a:uFillTx/>
-                <a:latin typeface="Arial"/>
-              </a:rPr>
-              <a:t>Fourth Outline Level</a:t>
-            </a:r>
-            <a:endParaRPr lang="en-US" sz="2000" b="0" u="none" strike="noStrike">
-              <a:solidFill>
-                <a:srgbClr val="000000"/>
-              </a:solidFill>
-              <a:effectLst/>
-              <a:uFillTx/>
-              <a:latin typeface="Arial"/>
-            </a:endParaRPr>
-          </a:p>
-          <a:p>
-            <a:pPr marL="2160000" lvl="4" indent="-216000" algn="l">
-              <a:spcBef>
-                <a:spcPts val="283"/>
-              </a:spcBef>
-              <a:buClr>
-                <a:srgbClr val="000000"/>
-              </a:buClr>
-              <a:buSzPct val="45000"/>
-              <a:buFont typeface="Wingdings" charset="2"/>
-              <a:buChar char=""/>
-            </a:pPr>
-            <a:r>
-              <a:rPr lang="en-US" sz="2000" b="0" u="none" strike="noStrike">
-                <a:solidFill>
-                  <a:srgbClr val="000000"/>
-                </a:solidFill>
-                <a:effectLst/>
-                <a:uFillTx/>
-                <a:latin typeface="Arial"/>
-              </a:rPr>
-              <a:t>Fifth Outline Level</a:t>
-            </a:r>
-            <a:endParaRPr lang="en-US" sz="2000" b="0" u="none" strike="noStrike">
-              <a:solidFill>
-                <a:srgbClr val="000000"/>
-              </a:solidFill>
-              <a:effectLst/>
-              <a:uFillTx/>
-              <a:latin typeface="Arial"/>
-            </a:endParaRPr>
-          </a:p>
-          <a:p>
-            <a:pPr marL="2592000" lvl="5" indent="-216000" algn="l">
-              <a:spcBef>
-                <a:spcPts val="283"/>
-              </a:spcBef>
-              <a:buClr>
-                <a:srgbClr val="000000"/>
-              </a:buClr>
-              <a:buSzPct val="45000"/>
-              <a:buFont typeface="Wingdings" charset="2"/>
-              <a:buChar char=""/>
-            </a:pPr>
-            <a:r>
-              <a:rPr lang="en-US" sz="2000" b="0" u="none" strike="noStrike">
-                <a:solidFill>
-                  <a:srgbClr val="000000"/>
-                </a:solidFill>
-                <a:effectLst/>
-                <a:uFillTx/>
-                <a:latin typeface="Arial"/>
-              </a:rPr>
-              <a:t>Sixth Outline Level</a:t>
-            </a:r>
-            <a:endParaRPr lang="en-US" sz="2000" b="0" u="none" strike="noStrike">
-              <a:solidFill>
-                <a:srgbClr val="000000"/>
-              </a:solidFill>
-              <a:effectLst/>
-              <a:uFillTx/>
-              <a:latin typeface="Arial"/>
-            </a:endParaRPr>
-          </a:p>
-          <a:p>
-            <a:pPr marL="3024000" lvl="6" indent="-216000" algn="l">
-              <a:spcBef>
-                <a:spcPts val="283"/>
-              </a:spcBef>
-              <a:buClr>
-                <a:srgbClr val="000000"/>
-              </a:buClr>
-              <a:buSzPct val="45000"/>
-              <a:buFont typeface="Wingdings" charset="2"/>
-              <a:buChar char=""/>
-            </a:pPr>
-            <a:r>
-              <a:rPr lang="en-US" sz="2000" b="0" u="none" strike="noStrike">
-                <a:solidFill>
-                  <a:srgbClr val="000000"/>
-                </a:solidFill>
-                <a:effectLst/>
-                <a:uFillTx/>
-                <a:latin typeface="Arial"/>
-              </a:rPr>
-              <a:t>Seventh Outline Level</a:t>
-            </a:r>
-            <a:endParaRPr lang="en-US" sz="2000" b="0" u="none" strike="noStrike">
-              <a:solidFill>
-                <a:srgbClr val="000000"/>
-              </a:solidFill>
-              <a:effectLst/>
-              <a:uFillTx/>
-              <a:latin typeface="Arial"/>
-            </a:endParaRPr>
-          </a:p>
-        </p:txBody>
-      </p:sp>
-      <p:sp>
-        <p:nvSpPr>
-          <p:cNvPr id="4" name="PlaceHolder 3"/>
+        </p:txBody>
+      </p:sp>
+      <p:sp>
+        <p:nvSpPr>
+          <p:cNvPr id="2" name="PlaceHolder 3"/>
           <p:cNvSpPr>
             <a:spLocks noGrp="1"/>
           </p:cNvSpPr>
@@ -1216,43 +993,37 @@
           </a:ln>
         </p:spPr>
         <p:txBody>
-          <a:bodyPr lIns="0" tIns="0" rIns="0" bIns="0" anchor="t">
+          <a:bodyPr lIns="0" rIns="0" tIns="0" bIns="0" anchor="t">
             <a:noAutofit/>
           </a:bodyPr>
           <a:lstStyle>
-            <a:lvl1pPr indent="0" algn="l">
-              <a:buNone/>
-              <a:defRPr lang="en-US" sz="1400" b="0" u="none" strike="noStrike">
-                <a:solidFill>
-                  <a:srgbClr val="000000"/>
-                </a:solidFill>
-                <a:effectLst/>
-                <a:uFillTx/>
+            <a:lvl1pPr indent="0">
+              <a:buNone/>
+              <a:defRPr b="0" lang="en-US" sz="1400" spc="-1" strike="noStrike">
+                <a:solidFill>
+                  <a:srgbClr val="000000"/>
+                </a:solidFill>
                 <a:latin typeface="Times New Roman"/>
               </a:defRPr>
             </a:lvl1pPr>
           </a:lstStyle>
           <a:p>
-            <a:pPr indent="0" algn="l">
-              <a:buNone/>
-            </a:pPr>
-            <a:r>
-              <a:rPr lang="en-US" sz="1400" b="0" u="none" strike="noStrike">
-                <a:solidFill>
-                  <a:srgbClr val="000000"/>
-                </a:solidFill>
-                <a:effectLst/>
-                <a:uFillTx/>
+            <a:pPr indent="0">
+              <a:buNone/>
+            </a:pPr>
+            <a:r>
+              <a:rPr b="0" lang="en-US" sz="1400" spc="-1" strike="noStrike">
+                <a:solidFill>
+                  <a:srgbClr val="000000"/>
+                </a:solidFill>
                 <a:latin typeface="Times New Roman"/>
               </a:rPr>
               <a:t>&lt;date/time&gt;</a:t>
             </a:r>
-            <a:endParaRPr lang="en-US" sz="1400" b="0" u="none" strike="noStrike">
-              <a:solidFill>
-                <a:srgbClr val="000000"/>
-              </a:solidFill>
-              <a:effectLst/>
-              <a:uFillTx/>
+            <a:endParaRPr b="0" lang="en-US" sz="1400" spc="-1" strike="noStrike">
+              <a:solidFill>
+                <a:srgbClr val="000000"/>
+              </a:solidFill>
               <a:latin typeface="Times New Roman"/>
             </a:endParaRPr>
           </a:p>
@@ -1260,7 +1031,7 @@
       </p:sp>
       <p:sp>
         <p:nvSpPr>
-          <p:cNvPr id="5" name="PlaceHolder 4"/>
+          <p:cNvPr id="3" name="PlaceHolder 4"/>
           <p:cNvSpPr>
             <a:spLocks noGrp="1"/>
           </p:cNvSpPr>
@@ -1282,18 +1053,16 @@
           </a:ln>
         </p:spPr>
         <p:txBody>
-          <a:bodyPr lIns="0" tIns="0" rIns="0" bIns="0" anchor="t">
+          <a:bodyPr lIns="0" rIns="0" tIns="0" bIns="0" anchor="t">
             <a:noAutofit/>
           </a:bodyPr>
           <a:lstStyle>
             <a:lvl1pPr indent="0" algn="ctr">
               <a:buNone/>
-              <a:defRPr lang="en-US" sz="1400" b="0" u="none" strike="noStrike">
-                <a:solidFill>
-                  <a:srgbClr val="000000"/>
-                </a:solidFill>
-                <a:effectLst/>
-                <a:uFillTx/>
+              <a:defRPr b="0" lang="en-US" sz="1400" spc="-1" strike="noStrike">
+                <a:solidFill>
+                  <a:srgbClr val="000000"/>
+                </a:solidFill>
                 <a:latin typeface="Times New Roman"/>
               </a:defRPr>
             </a:lvl1pPr>
@@ -1303,22 +1072,18 @@
               <a:buNone/>
             </a:pPr>
             <a:r>
-              <a:rPr lang="en-US" sz="1400" b="0" u="none" strike="noStrike">
-                <a:solidFill>
-                  <a:srgbClr val="000000"/>
-                </a:solidFill>
-                <a:effectLst/>
-                <a:uFillTx/>
+              <a:rPr b="0" lang="en-US" sz="1400" spc="-1" strike="noStrike">
+                <a:solidFill>
+                  <a:srgbClr val="000000"/>
+                </a:solidFill>
                 <a:latin typeface="Times New Roman"/>
               </a:rPr>
               <a:t>&lt;footer&gt;</a:t>
             </a:r>
-            <a:endParaRPr lang="en-US" sz="1400" b="0" u="none" strike="noStrike">
-              <a:solidFill>
-                <a:srgbClr val="000000"/>
-              </a:solidFill>
-              <a:effectLst/>
-              <a:uFillTx/>
+            <a:endParaRPr b="0" lang="en-US" sz="1400" spc="-1" strike="noStrike">
+              <a:solidFill>
+                <a:srgbClr val="000000"/>
+              </a:solidFill>
               <a:latin typeface="Times New Roman"/>
             </a:endParaRPr>
           </a:p>
@@ -1326,7 +1091,7 @@
       </p:sp>
       <p:sp>
         <p:nvSpPr>
-          <p:cNvPr id="6" name="PlaceHolder 5"/>
+          <p:cNvPr id="4" name="PlaceHolder 5"/>
           <p:cNvSpPr>
             <a:spLocks noGrp="1"/>
           </p:cNvSpPr>
@@ -1348,18 +1113,16 @@
           </a:ln>
         </p:spPr>
         <p:txBody>
-          <a:bodyPr lIns="0" tIns="0" rIns="0" bIns="0" anchor="t">
+          <a:bodyPr lIns="0" rIns="0" tIns="0" bIns="0" anchor="t">
             <a:noAutofit/>
           </a:bodyPr>
           <a:lstStyle>
             <a:lvl1pPr indent="0" algn="r">
               <a:buNone/>
-              <a:defRPr lang="en-US" sz="1400" b="0" u="none" strike="noStrike">
-                <a:solidFill>
-                  <a:srgbClr val="000000"/>
-                </a:solidFill>
-                <a:effectLst/>
-                <a:uFillTx/>
+              <a:defRPr b="0" lang="en-US" sz="1400" spc="-1" strike="noStrike">
+                <a:solidFill>
+                  <a:srgbClr val="000000"/>
+                </a:solidFill>
                 <a:latin typeface="Times New Roman"/>
               </a:defRPr>
             </a:lvl1pPr>
@@ -1368,23 +1131,19 @@
             <a:pPr indent="0" algn="r">
               <a:buNone/>
             </a:pPr>
-            <a:fld id="{BAF95D3D-2696-47A9-806B-9652FE430418}" type="slidenum">
-              <a:rPr lang="en-US" sz="1400" b="0" u="none" strike="noStrike">
-                <a:solidFill>
-                  <a:srgbClr val="000000"/>
-                </a:solidFill>
-                <a:effectLst/>
-                <a:uFillTx/>
+            <a:fld id="{47DCD0AF-B429-4E19-9E13-EF385C65E361}" type="slidenum">
+              <a:rPr b="0" lang="en-US" sz="1400" spc="-1" strike="noStrike">
+                <a:solidFill>
+                  <a:srgbClr val="000000"/>
+                </a:solidFill>
                 <a:latin typeface="Times New Roman"/>
               </a:rPr>
               <a:t>&lt;number&gt;</a:t>
             </a:fld>
-            <a:endParaRPr lang="en-US" sz="1400" b="0" u="none" strike="noStrike">
-              <a:solidFill>
-                <a:srgbClr val="000000"/>
-              </a:solidFill>
-              <a:effectLst/>
-              <a:uFillTx/>
+            <a:endParaRPr b="0" lang="en-US" sz="1400" spc="-1" strike="noStrike">
+              <a:solidFill>
+                <a:srgbClr val="000000"/>
+              </a:solidFill>
               <a:latin typeface="Times New Roman"/>
             </a:endParaRPr>
           </a:p>
@@ -1392,7 +1151,7 @@
       </p:sp>
     </p:spTree>
   </p:cSld>
-  <p:clrMap bg1="lt1" tx1="dk1" bg2="lt2" tx2="dk2" accent1="accent1" accent2="accent2" accent3="accent3" accent4="accent4" accent5="accent5" accent6="accent6" hlink="hlink" folHlink="folHlink"/>
+  <p:clrMap bg1="lt1" bg2="lt2" tx1="dk1" tx2="dk2" accent1="accent1" accent2="accent2" accent3="accent3" accent4="accent4" accent5="accent5" accent6="accent6" hlink="hlink" folHlink="folHlink"/>
   <p:sldLayoutIdLst>
     <p:sldLayoutId id="2147483649" r:id="rId2"/>
     <p:sldLayoutId id="2147483650" r:id="rId3"/>
@@ -1419,7 +1178,7 @@
       </p:grpSpPr>
       <p:sp>
         <p:nvSpPr>
-          <p:cNvPr id="15" name="title"/>
+          <p:cNvPr id="13" name="title"/>
           <p:cNvSpPr txBox="1"/>
           <p:nvPr/>
         </p:nvSpPr>
@@ -1432,33 +1191,28 @@
             <a:avLst/>
           </a:prstGeom>
           <a:noFill/>
-          <a:ln w="38160">
+          <a:ln w="0">
             <a:noFill/>
           </a:ln>
         </p:spPr>
         <p:txBody>
-          <a:bodyPr lIns="90000" tIns="45000" rIns="90000" bIns="45000" anchor="t">
-            <a:spAutoFit/>
-          </a:bodyPr>
-          <a:p>
-            <a:pPr/>
-            <a:r>
-              <a:rPr lang="en-US" sz="3200" b="1" u="none" strike="noStrike">
-                <a:solidFill>
-                  <a:srgbClr val="000000"/>
-                </a:solidFill>
-                <a:effectLst/>
-                <a:uFillTx/>
+          <a:bodyPr lIns="90000" rIns="90000" tIns="45000" bIns="45000" anchor="t">
+            <a:noAutofit/>
+          </a:bodyPr>
+          <a:p>
+            <a:r>
+              <a:rPr b="1" lang="en-US" sz="3200" spc="-1" strike="noStrike">
+                <a:solidFill>
+                  <a:srgbClr val="000000"/>
+                </a:solidFill>
                 <a:latin typeface="Arial"/>
               </a:rPr>
               <a:t>Briefing</a:t>
             </a:r>
-            <a:endParaRPr lang="en-US" sz="3200" b="0" u="none" strike="noStrike">
-              <a:solidFill>
-                <a:srgbClr val="000000"/>
-              </a:solidFill>
-              <a:effectLst/>
-              <a:uFillTx/>
+            <a:endParaRPr b="0" lang="en-US" sz="3200" spc="-1" strike="noStrike">
+              <a:solidFill>
+                <a:srgbClr val="000000"/>
+              </a:solidFill>
               <a:latin typeface="Arial"/>
             </a:endParaRPr>
           </a:p>
@@ -1496,7 +1250,7 @@
       </p:grpSpPr>
       <p:sp>
         <p:nvSpPr>
-          <p:cNvPr id="16" name="title"/>
+          <p:cNvPr id="14" name="title"/>
           <p:cNvSpPr txBox="1"/>
           <p:nvPr/>
         </p:nvSpPr>
@@ -1509,33 +1263,28 @@
             <a:avLst/>
           </a:prstGeom>
           <a:noFill/>
-          <a:ln w="38160">
+          <a:ln w="0">
             <a:noFill/>
           </a:ln>
         </p:spPr>
         <p:txBody>
-          <a:bodyPr lIns="90000" tIns="45000" rIns="90000" bIns="45000" anchor="t">
-            <a:spAutoFit/>
-          </a:bodyPr>
-          <a:p>
-            <a:pPr/>
-            <a:r>
-              <a:rPr lang="en-US" sz="3200" b="1" u="none" strike="noStrike">
-                <a:solidFill>
-                  <a:srgbClr val="000000"/>
-                </a:solidFill>
-                <a:effectLst/>
-                <a:uFillTx/>
+          <a:bodyPr lIns="90000" rIns="90000" tIns="45000" bIns="45000" anchor="t">
+            <a:noAutofit/>
+          </a:bodyPr>
+          <a:p>
+            <a:r>
+              <a:rPr b="1" lang="en-US" sz="3200" spc="-1" strike="noStrike">
+                <a:solidFill>
+                  <a:srgbClr val="000000"/>
+                </a:solidFill>
                 <a:latin typeface="Arial"/>
               </a:rPr>
               <a:t>Hidden Appendix</a:t>
             </a:r>
-            <a:endParaRPr lang="en-US" sz="3200" b="0" u="none" strike="noStrike">
-              <a:solidFill>
-                <a:srgbClr val="000000"/>
-              </a:solidFill>
-              <a:effectLst/>
-              <a:uFillTx/>
+            <a:endParaRPr b="0" lang="en-US" sz="3200" spc="-1" strike="noStrike">
+              <a:solidFill>
+                <a:srgbClr val="000000"/>
+              </a:solidFill>
               <a:latin typeface="Arial"/>
             </a:endParaRPr>
           </a:p>
@@ -1543,7 +1292,7 @@
       </p:sp>
       <p:sp>
         <p:nvSpPr>
-          <p:cNvPr id="17" name="shape"/>
+          <p:cNvPr id="15" name="shape"/>
           <p:cNvSpPr txBox="1"/>
           <p:nvPr/>
         </p:nvSpPr>
@@ -1556,41 +1305,32 @@
             <a:avLst/>
           </a:prstGeom>
           <a:solidFill>
-            <a:schemeClr val="accent1"/>
+            <a:srgbClr val="729fcf"/>
           </a:solidFill>
-          <a:ln w="38160">
+          <a:ln w="0">
             <a:solidFill>
-              <a:schemeClr val="accent1">
-                <a:lumMod val="75000"/>
-                <a:lumOff val="0"/>
-              </a:schemeClr>
+              <a:srgbClr val="3465a4"/>
             </a:solidFill>
-            <a:round/>
-          </a:ln>
-        </p:spPr>
-        <p:txBody>
-          <a:bodyPr lIns="90000" tIns="45000" rIns="90000" bIns="45000" anchor="t">
-            <a:spAutoFit/>
-          </a:bodyPr>
-          <a:p>
-            <a:pPr/>
-            <a:r>
-              <a:rPr lang="en-US" sz="1800" b="0" u="none" strike="noStrike">
-                <a:solidFill>
-                  <a:srgbClr val="FFFFFF"/>
-                </a:solidFill>
-                <a:effectLst/>
-                <a:uFillTx/>
+          </a:ln>
+        </p:spPr>
+        <p:txBody>
+          <a:bodyPr lIns="90000" rIns="90000" tIns="45000" bIns="45000" anchor="t">
+            <a:noAutofit/>
+          </a:bodyPr>
+          <a:p>
+            <a:r>
+              <a:rPr b="0" lang="en-US" sz="1800" spc="-1" strike="noStrike">
+                <a:solidFill>
+                  <a:srgbClr val="000000"/>
+                </a:solidFill>
                 <a:latin typeface="Arial"/>
               </a:rPr>
               <a:t>Synthetic internal appendix</a:t>
             </a:r>
-            <a:endParaRPr lang="en-US" sz="1800" b="0" u="none" strike="noStrike">
-              <a:solidFill>
-                <a:srgbClr val="FFFFFF"/>
-              </a:solidFill>
-              <a:effectLst/>
-              <a:uFillTx/>
+            <a:endParaRPr b="0" lang="en-US" sz="1800" spc="-1" strike="noStrike">
+              <a:solidFill>
+                <a:srgbClr val="000000"/>
+              </a:solidFill>
               <a:latin typeface="Arial"/>
             </a:endParaRPr>
           </a:p>
@@ -1617,37 +1357,37 @@
         <a:srgbClr val="000000"/>
       </a:dk1>
       <a:lt1>
-        <a:srgbClr val="FFFFFF"/>
+        <a:srgbClr val="ffffff"/>
       </a:lt1>
       <a:dk2>
         <a:srgbClr val="000000"/>
       </a:dk2>
       <a:lt2>
-        <a:srgbClr val="FFFFFF"/>
+        <a:srgbClr val="ffffff"/>
       </a:lt2>
       <a:accent1>
-        <a:srgbClr val="18A303"/>
+        <a:srgbClr val="18a303"/>
       </a:accent1>
       <a:accent2>
-        <a:srgbClr val="0369A3"/>
+        <a:srgbClr val="0369a3"/>
       </a:accent2>
       <a:accent3>
-        <a:srgbClr val="A33E03"/>
+        <a:srgbClr val="a33e03"/>
       </a:accent3>
       <a:accent4>
-        <a:srgbClr val="8E03A3"/>
+        <a:srgbClr val="8e03a3"/>
       </a:accent4>
       <a:accent5>
-        <a:srgbClr val="C99C00"/>
+        <a:srgbClr val="c99c00"/>
       </a:accent5>
       <a:accent6>
-        <a:srgbClr val="C9211E"/>
+        <a:srgbClr val="c9211e"/>
       </a:accent6>
       <a:hlink>
-        <a:srgbClr val="0000EE"/>
+        <a:srgbClr val="0000ee"/>
       </a:hlink>
       <a:folHlink>
-        <a:srgbClr val="551A8B"/>
+        <a:srgbClr val="551a8b"/>
       </a:folHlink>
     </a:clrScheme>
     <a:fontScheme name="Office">
@@ -1723,37 +1463,37 @@
         <a:srgbClr val="000000"/>
       </a:dk1>
       <a:lt1>
-        <a:srgbClr val="FFFFFF"/>
+        <a:srgbClr val="ffffff"/>
       </a:lt1>
       <a:dk2>
         <a:srgbClr val="000000"/>
       </a:dk2>
       <a:lt2>
-        <a:srgbClr val="FFFFFF"/>
+        <a:srgbClr val="ffffff"/>
       </a:lt2>
       <a:accent1>
-        <a:srgbClr val="18A303"/>
+        <a:srgbClr val="18a303"/>
       </a:accent1>
       <a:accent2>
-        <a:srgbClr val="0369A3"/>
+        <a:srgbClr val="0369a3"/>
       </a:accent2>
       <a:accent3>
-        <a:srgbClr val="A33E03"/>
+        <a:srgbClr val="a33e03"/>
       </a:accent3>
       <a:accent4>
-        <a:srgbClr val="8E03A3"/>
+        <a:srgbClr val="8e03a3"/>
       </a:accent4>
       <a:accent5>
-        <a:srgbClr val="C99C00"/>
+        <a:srgbClr val="c99c00"/>
       </a:accent5>
       <a:accent6>
-        <a:srgbClr val="C9211E"/>
+        <a:srgbClr val="c9211e"/>
       </a:accent6>
       <a:hlink>
-        <a:srgbClr val="0000EE"/>
+        <a:srgbClr val="0000ee"/>
       </a:hlink>
       <a:folHlink>
-        <a:srgbClr val="551A8B"/>
+        <a:srgbClr val="551a8b"/>
       </a:folHlink>
     </a:clrScheme>
     <a:fontScheme name="Office">
